--- a/slides-4-bandwidth-crisis.pptx
+++ b/slides-4-bandwidth-crisis.pptx
@@ -18,6 +18,7 @@
     <p:sldId id="269" r:id="rId9"/>
     <p:sldId id="264" r:id="rId10"/>
     <p:sldId id="263" r:id="rId11"/>
+    <p:sldId id="272" r:id="rId19"/>
     <p:sldId id="271" r:id="rId12"/>
     <p:sldId id="265" r:id="rId13"/>
   </p:sldIdLst>
@@ -4121,6 +4122,366 @@
                 <a:ea typeface="Microsoft JhengHei" pitchFamily="34" charset="-122"/>
                 <a:cs typeface="Microsoft JhengHei" pitchFamily="34" charset="-120"/>
               </a:rPr>
+              <a:t>MISSION 04 · 火星第一眼：1976 維京一號的拍照任務　11</a:t>
+            </a:r>
+            <a:endParaRPr lang="en-US" sz="900" dirty="0"/>
+          </a:p>
+        </p:txBody>
+      </p:sp>
+      <p:sp>
+        <p:nvSpPr>
+          <p:cNvPr id="4" name="Text 1"/>
+          <p:cNvSpPr/>
+          <p:nvPr/>
+        </p:nvSpPr>
+        <p:spPr>
+          <a:xfrm>
+            <a:off x="457200" y="411480"/>
+            <a:ext cx="5486400" cy="502920"/>
+          </a:xfrm>
+          <a:prstGeom prst="rect">
+            <a:avLst/>
+          </a:prstGeom>
+          <a:noFill/>
+          <a:ln/>
+        </p:spPr>
+        <p:txBody>
+          <a:bodyPr wrap="square" lIns="0" tIns="0" rIns="0" bIns="0" rtlCol="0" anchor="ctr"/>
+          <a:lstStyle/>
+          <a:p>
+            <a:pPr marL="0" indent="0">
+              <a:buNone/>
+            </a:pPr>
+            <a:r>
+              <a:rPr lang="en-US" sz="2400" b="1" dirty="0">
+                <a:solidFill>
+                  <a:srgbClr val="FF5C47"/>
+                </a:solidFill>
+                <a:latin typeface="Microsoft JhengHei" pitchFamily="34" charset="0"/>
+                <a:ea typeface="Microsoft JhengHei" pitchFamily="34" charset="-122"/>
+                <a:cs typeface="Microsoft JhengHei" pitchFamily="34" charset="-120"/>
+              </a:rPr>
+              <a:t>🖼 </a:t>
+            </a:r>
+            <a:r>
+              <a:rPr lang="zh-TW" altLang="en-US" sz="2400" b="1" dirty="0" smtClean="0">
+                <a:solidFill>
+                  <a:srgbClr val="FF5C47"/>
+                </a:solidFill>
+                <a:latin typeface="Microsoft JhengHei" pitchFamily="34" charset="0"/>
+                <a:ea typeface="Microsoft JhengHei" pitchFamily="34" charset="-122"/>
+                <a:cs typeface="Microsoft JhengHei" pitchFamily="34" charset="-120"/>
+              </a:rPr>
+              <a:t>猜猜哪張照片最好壓縮</a:t>
+            </a:r>
+            <a:endParaRPr lang="en-US" sz="2400" dirty="0"/>
+          </a:p>
+        </p:txBody>
+      </p:sp>
+      <p:sp>
+        <p:nvSpPr>
+          <p:cNvPr id="5" name="Text 2"/>
+          <p:cNvSpPr/>
+          <p:nvPr/>
+        </p:nvSpPr>
+        <p:spPr>
+          <a:xfrm>
+            <a:off x="0" y="1828800"/>
+            <a:ext cx="12191695" cy="548640"/>
+          </a:xfrm>
+          <a:prstGeom prst="rect">
+            <a:avLst/>
+          </a:prstGeom>
+          <a:noFill/>
+          <a:ln/>
+        </p:spPr>
+        <p:txBody>
+          <a:bodyPr wrap="square" lIns="0" tIns="0" rIns="0" bIns="0" rtlCol="0" anchor="ctr"/>
+          <a:lstStyle/>
+          <a:p>
+            <a:pPr marL="0" indent="0" algn="ctr">
+              <a:buNone/>
+            </a:pPr>
+            <a:r>
+              <a:rPr lang="zh-TW" altLang="en-US" sz="2200" dirty="0" smtClean="0">
+                <a:solidFill>
+                  <a:srgbClr val="C9D6E8"/>
+                </a:solidFill>
+                <a:latin typeface="Microsoft JhengHei" pitchFamily="34" charset="0"/>
+                <a:ea typeface="Microsoft JhengHei" pitchFamily="34" charset="-122"/>
+                <a:cs typeface="Microsoft JhengHei" pitchFamily="34" charset="-120"/>
+              </a:rPr>
+              <a:t>一張大片藍天的照片　vs　一張長滿雜草小花的風景照</a:t>
+            </a:r>
+            <a:endParaRPr lang="en-US" sz="2200" dirty="0"/>
+          </a:p>
+        </p:txBody>
+      </p:sp>
+      <p:sp>
+        <p:nvSpPr>
+          <p:cNvPr id="6" name="Text 3"/>
+          <p:cNvSpPr/>
+          <p:nvPr/>
+        </p:nvSpPr>
+        <p:spPr>
+          <a:xfrm>
+            <a:off x="0" y="2377440"/>
+            <a:ext cx="12191695" cy="914400"/>
+          </a:xfrm>
+          <a:prstGeom prst="rect">
+            <a:avLst/>
+          </a:prstGeom>
+          <a:noFill/>
+          <a:ln/>
+        </p:spPr>
+        <p:txBody>
+          <a:bodyPr wrap="square" lIns="0" tIns="0" rIns="0" bIns="0" rtlCol="0" anchor="ctr"/>
+          <a:lstStyle/>
+          <a:p>
+            <a:pPr marL="0" indent="0" algn="ctr">
+              <a:buNone/>
+            </a:pPr>
+            <a:r>
+              <a:rPr lang="en-US" sz="4000" b="1" dirty="0" err="1">
+                <a:solidFill>
+                  <a:srgbClr val="F2E3C8"/>
+                </a:solidFill>
+                <a:latin typeface="Microsoft JhengHei" pitchFamily="34" charset="0"/>
+                <a:ea typeface="Microsoft JhengHei" pitchFamily="34" charset="-122"/>
+                <a:cs typeface="Microsoft JhengHei" pitchFamily="34" charset="-120"/>
+              </a:rPr>
+              <a:t>哪一張用「代號×數量」</a:t>
+            </a:r>
+            <a:r>
+              <a:rPr lang="en-US" sz="4000" b="1" dirty="0" smtClean="0">
+                <a:solidFill>
+                  <a:srgbClr val="F2E3C8"/>
+                </a:solidFill>
+                <a:latin typeface="Microsoft JhengHei" pitchFamily="34" charset="0"/>
+                <a:ea typeface="Microsoft JhengHei" pitchFamily="34" charset="-122"/>
+                <a:cs typeface="Microsoft JhengHei" pitchFamily="34" charset="-120"/>
+              </a:rPr>
+              <a:t>，</a:t>
+            </a:r>
+            <a:r>
+              <a:rPr lang="zh-TW" altLang="en-US" sz="4000" b="1" dirty="0" smtClean="0">
+                <a:solidFill>
+                  <a:srgbClr val="F2E3C8"/>
+                </a:solidFill>
+                <a:latin typeface="Microsoft JhengHei" pitchFamily="34" charset="0"/>
+                <a:ea typeface="Microsoft JhengHei" pitchFamily="34" charset="-122"/>
+                <a:cs typeface="Microsoft JhengHei" pitchFamily="34" charset="-120"/>
+              </a:rPr>
+              <a:t>可以省下最多訊號</a:t>
+            </a:r>
+            <a:r>
+              <a:rPr lang="en-US" sz="4000" b="1" dirty="0" smtClean="0">
+                <a:solidFill>
+                  <a:srgbClr val="F2E3C8"/>
+                </a:solidFill>
+                <a:latin typeface="Microsoft JhengHei" pitchFamily="34" charset="0"/>
+                <a:ea typeface="Microsoft JhengHei" pitchFamily="34" charset="-122"/>
+                <a:cs typeface="Microsoft JhengHei" pitchFamily="34" charset="-120"/>
+              </a:rPr>
+              <a:t>？</a:t>
+            </a:r>
+            <a:endParaRPr lang="en-US" sz="4000" dirty="0"/>
+          </a:p>
+        </p:txBody>
+      </p:sp>
+      <p:sp>
+        <p:nvSpPr>
+          <p:cNvPr id="7" name="Shape 4"/>
+          <p:cNvSpPr/>
+          <p:nvPr/>
+        </p:nvSpPr>
+        <p:spPr>
+          <a:xfrm>
+            <a:off x="3108959" y="3931920"/>
+            <a:ext cx="7360501" cy="2011680"/>
+          </a:xfrm>
+          <a:prstGeom prst="roundRect">
+            <a:avLst>
+              <a:gd name="adj" fmla="val 5333"/>
+            </a:avLst>
+          </a:prstGeom>
+          <a:solidFill>
+            <a:srgbClr val="0D1424"/>
+          </a:solidFill>
+          <a:ln w="12700">
+            <a:solidFill>
+              <a:srgbClr val="1E3A5C"/>
+            </a:solidFill>
+            <a:prstDash val="solid"/>
+          </a:ln>
+        </p:spPr>
+      </p:sp>
+      <p:sp>
+        <p:nvSpPr>
+          <p:cNvPr id="8" name="Text 5"/>
+          <p:cNvSpPr/>
+          <p:nvPr/>
+        </p:nvSpPr>
+        <p:spPr>
+          <a:xfrm>
+            <a:off x="3429000" y="4206240"/>
+            <a:ext cx="6897848" cy="1645920"/>
+          </a:xfrm>
+          <a:prstGeom prst="rect">
+            <a:avLst/>
+          </a:prstGeom>
+          <a:noFill/>
+          <a:ln/>
+        </p:spPr>
+        <p:txBody>
+          <a:bodyPr wrap="square" lIns="0" tIns="0" rIns="0" bIns="0" rtlCol="0" anchor="t"/>
+          <a:lstStyle/>
+          <a:p>
+            <a:pPr marL="0" indent="0">
+              <a:spcAft>
+                <a:spcPts val="600"/>
+              </a:spcAft>
+              <a:buNone/>
+            </a:pPr>
+            <a:r>
+              <a:rPr lang="en-US" sz="1800" b="1" dirty="0">
+                <a:solidFill>
+                  <a:srgbClr val="FFB347"/>
+                </a:solidFill>
+                <a:latin typeface="Microsoft JhengHei" pitchFamily="34" charset="0"/>
+                <a:ea typeface="Microsoft JhengHei" pitchFamily="34" charset="-122"/>
+                <a:cs typeface="Microsoft JhengHei" pitchFamily="34" charset="-120"/>
+              </a:rPr>
+              <a:t>舉手預測＋說理由 2 </a:t>
+            </a:r>
+            <a:r>
+              <a:rPr lang="en-US" sz="1800" b="1" dirty="0" err="1" smtClean="0">
+                <a:solidFill>
+                  <a:srgbClr val="FFB347"/>
+                </a:solidFill>
+                <a:latin typeface="Microsoft JhengHei" pitchFamily="34" charset="0"/>
+                <a:ea typeface="Microsoft JhengHei" pitchFamily="34" charset="-122"/>
+                <a:cs typeface="Microsoft JhengHei" pitchFamily="34" charset="-120"/>
+              </a:rPr>
+              <a:t>分鐘</a:t>
+            </a:r>
+            <a:endParaRPr lang="en-US" sz="1800" dirty="0"/>
+          </a:p>
+          <a:p>
+            <a:endParaRPr lang="en-US" dirty="0" smtClean="0">
+              <a:solidFill>
+                <a:srgbClr val="C9D6E8"/>
+              </a:solidFill>
+              <a:latin typeface="Microsoft JhengHei" pitchFamily="34" charset="0"/>
+              <a:ea typeface="Microsoft JhengHei" pitchFamily="34" charset="-122"/>
+              <a:cs typeface="Microsoft JhengHei" pitchFamily="34" charset="-120"/>
+            </a:endParaRPr>
+          </a:p>
+          <a:p>
+            <a:r>
+              <a:rPr lang="zh-TW" altLang="en-US" dirty="0" smtClean="0">
+                <a:solidFill>
+                  <a:srgbClr val="C9D6E8"/>
+                </a:solidFill>
+                <a:latin typeface="Microsoft JhengHei" pitchFamily="34" charset="0"/>
+                <a:ea typeface="Microsoft JhengHei" pitchFamily="34" charset="-122"/>
+                <a:cs typeface="Microsoft JhengHei" pitchFamily="34" charset="-120"/>
+              </a:rPr>
+              <a:t>提示</a:t>
+            </a:r>
+            <a:r>
+              <a:rPr lang="zh-TW" altLang="en-US" dirty="0" smtClean="0">
+                <a:solidFill>
+                  <a:srgbClr val="C9D6E8"/>
+                </a:solidFill>
+                <a:latin typeface="Microsoft JhengHei" pitchFamily="34" charset="0"/>
+                <a:ea typeface="Microsoft JhengHei" pitchFamily="34" charset="-122"/>
+                <a:cs typeface="Microsoft JhengHei" pitchFamily="34" charset="-120"/>
+              </a:rPr>
+              <a:t>：大片相同的顏色＝長長的連續段，最好壓；格格都在變化，像棋盤格一樣不划算。回家任務：記下自己一張照片的解析度（如 4000×3000），下一節要用！</a:t>
+            </a:r>
+            <a:endParaRPr lang="en-US" dirty="0"/>
+          </a:p>
+        </p:txBody>
+      </p:sp>
+    </p:spTree>
+    <p:extLst>
+      <p:ext uri="{BB962C8B-B14F-4D97-AF65-F5344CB8AC3E}">
+        <p14:creationId xmlns:p14="http://schemas.microsoft.com/office/powerpoint/2010/main" val="3068798542"/>
+      </p:ext>
+    </p:extLst>
+  </p:cSld>
+  <p:clrMapOvr>
+    <a:masterClrMapping/>
+  </p:clrMapOvr>
+  <p:timing>
+    <p:tnLst>
+      <p:par>
+        <p:cTn id="1" dur="indefinite" restart="never" nodeType="tmRoot"/>
+      </p:par>
+    </p:tnLst>
+  </p:timing>
+</p:sld>
+</file>
+
+<file path=ppt/slides/slide12.xml><?xml version="1.0" encoding="utf-8"?>
+<p:sld xmlns:a="http://schemas.openxmlformats.org/drawingml/2006/main" xmlns:r="http://schemas.openxmlformats.org/officeDocument/2006/relationships" xmlns:p="http://schemas.openxmlformats.org/presentationml/2006/main">
+  <p:cSld>
+    <p:bg>
+      <p:bgPr>
+        <a:solidFill>
+          <a:srgbClr val="070B14"/>
+        </a:solidFill>
+        <a:effectLst/>
+      </p:bgPr>
+    </p:bg>
+    <p:spTree>
+      <p:nvGrpSpPr>
+        <p:cNvPr id="1" name=""/>
+        <p:cNvGrpSpPr/>
+        <p:nvPr/>
+      </p:nvGrpSpPr>
+      <p:grpSpPr>
+        <a:xfrm>
+          <a:off x="0" y="0"/>
+          <a:ext cx="0" cy="0"/>
+          <a:chOff x="0" y="0"/>
+          <a:chExt cx="0" cy="0"/>
+        </a:xfrm>
+      </p:grpSpPr>
+      <p:sp>
+        <p:nvSpPr>
+          <p:cNvPr id="2" name="Text 0"/>
+          <p:cNvSpPr/>
+          <p:nvPr/>
+        </p:nvSpPr>
+        <p:spPr>
+          <a:xfrm>
+            <a:off x="457200" y="6473952"/>
+            <a:ext cx="7315200" cy="274320"/>
+          </a:xfrm>
+          <a:prstGeom prst="rect">
+            <a:avLst/>
+          </a:prstGeom>
+          <a:noFill/>
+          <a:ln/>
+        </p:spPr>
+        <p:txBody>
+          <a:bodyPr wrap="square" lIns="0" tIns="0" rIns="0" bIns="0" rtlCol="0" anchor="ctr"/>
+          <a:lstStyle/>
+          <a:p>
+            <a:pPr marL="0" indent="0">
+              <a:buNone/>
+            </a:pPr>
+            <a:r>
+              <a:rPr lang="en-US" sz="900" dirty="0">
+                <a:solidFill>
+                  <a:srgbClr val="7A93AE"/>
+                </a:solidFill>
+                <a:latin typeface="Microsoft JhengHei" pitchFamily="34" charset="0"/>
+                <a:ea typeface="Microsoft JhengHei" pitchFamily="34" charset="-122"/>
+                <a:cs typeface="Microsoft JhengHei" pitchFamily="34" charset="-120"/>
+              </a:rPr>
               <a:t>MISSION 02 · 火星第一眼：1976 維京一號的拍照任務　11</a:t>
             </a:r>
             <a:endParaRPr lang="en-US" sz="900" dirty="0"/>
@@ -4880,7 +5241,7 @@
 </p:sld>
 </file>
 
-<file path=ppt/slides/slide12.xml><?xml version="1.0" encoding="utf-8"?>
+<file path=ppt/slides/slide13.xml><?xml version="1.0" encoding="utf-8"?>
 <p:sld xmlns:a="http://schemas.openxmlformats.org/drawingml/2006/main" xmlns:r="http://schemas.openxmlformats.org/officeDocument/2006/relationships" xmlns:p="http://schemas.openxmlformats.org/presentationml/2006/main">
   <p:cSld name="Slide 10">
     <p:bg>
